--- a/docs/webinar/E2E-1/E2E-1-ficha.pptx
+++ b/docs/webinar/E2E-1/E2E-1-ficha.pptx
@@ -108,7 +108,7 @@
   <p:extLst>
     <p:ext uri="{521415D9-36F7-43E2-AB2F-B90AF26B5E84}">
       <p14:sectionLst xmlns:p14="http://schemas.microsoft.com/office/powerpoint/2010/main">
-        <p14:section name="Ficha del taller" id="{7e507d3a-ae33-c460-e17d-4a56472021d2}">
+        <p14:section name="Ficha del taller" id="{a4ba2e7d-3ca4-90e8-3039-972cd54bdcae}">
           <p14:sldIdLst>
             <p14:sldId id="256"/>
             <p14:sldId id="257"/>
@@ -862,7 +862,7 @@
                   <a:srgbClr val="696969"/>
                 </a:solidFill>
               </a:rPr>
-              <a:t>pm-method 2.4.0 · Webinar E2E-1 · Ficha del taller</a:t>
+              <a:t>pm-method 2.5.0 · Webinar E2E-1 · Ficha del taller</a:t>
             </a:r>
             <a:endParaRPr lang="en-US" sz="1000" dirty="0"/>
           </a:p>
@@ -1102,7 +1102,7 @@
                   <a:srgbClr val="696969"/>
                 </a:solidFill>
               </a:rPr>
-              <a:t>pm-method 2.4.0 · Webinar E2E-1 · Ficha del taller</a:t>
+              <a:t>pm-method 2.5.0 · Webinar E2E-1 · Ficha del taller</a:t>
             </a:r>
             <a:endParaRPr lang="en-US" sz="1000" dirty="0"/>
           </a:p>
@@ -1535,7 +1535,7 @@
                 <a:ea typeface="Arial" pitchFamily="34" charset="-122"/>
                 <a:cs typeface="Arial" pitchFamily="34" charset="-120"/>
               </a:rPr>
-              <a:t>Taller · 2 clases de 90 minutos · Webinar pm-method 2.4.0 · E2E-1</a:t>
+              <a:t>Taller · 2 clases de 90 minutos · Webinar pm-method 2.5.0 · E2E-1</a:t>
             </a:r>
             <a:endParaRPr lang="en-US" sz="1400" dirty="0"/>
           </a:p>

--- a/docs/webinar/E2E-1/E2E-1-ficha.pptx
+++ b/docs/webinar/E2E-1/E2E-1-ficha.pptx
@@ -108,7 +108,7 @@
   <p:extLst>
     <p:ext uri="{521415D9-36F7-43E2-AB2F-B90AF26B5E84}">
       <p14:sectionLst xmlns:p14="http://schemas.microsoft.com/office/powerpoint/2010/main">
-        <p14:section name="Ficha del taller" id="{a4ba2e7d-3ca4-90e8-3039-972cd54bdcae}">
+        <p14:section name="Ficha del taller" id="{06b08cbb-2df1-f479-e011-48c2cd8115cc}">
           <p14:sldIdLst>
             <p14:sldId id="256"/>
             <p14:sldId id="257"/>
@@ -862,7 +862,7 @@
                   <a:srgbClr val="696969"/>
                 </a:solidFill>
               </a:rPr>
-              <a:t>pm-method 2.5.0 · Webinar E2E-1 · Ficha del taller</a:t>
+              <a:t>pm-method 2.5.1 · Webinar E2E-1 · Ficha del taller</a:t>
             </a:r>
             <a:endParaRPr lang="en-US" sz="1000" dirty="0"/>
           </a:p>
@@ -1102,7 +1102,7 @@
                   <a:srgbClr val="696969"/>
                 </a:solidFill>
               </a:rPr>
-              <a:t>pm-method 2.5.0 · Webinar E2E-1 · Ficha del taller</a:t>
+              <a:t>pm-method 2.5.1 · Webinar E2E-1 · Ficha del taller</a:t>
             </a:r>
             <a:endParaRPr lang="en-US" sz="1000" dirty="0"/>
           </a:p>
@@ -1535,7 +1535,7 @@
                 <a:ea typeface="Arial" pitchFamily="34" charset="-122"/>
                 <a:cs typeface="Arial" pitchFamily="34" charset="-120"/>
               </a:rPr>
-              <a:t>Taller · 2 clases de 90 minutos · Webinar pm-method 2.5.0 · E2E-1</a:t>
+              <a:t>Taller · 2 clases de 90 minutos · Webinar pm-method 2.5.1 · E2E-1</a:t>
             </a:r>
             <a:endParaRPr lang="en-US" sz="1400" dirty="0"/>
           </a:p>
@@ -1969,7 +1969,7 @@
                 <a:ea typeface="Arial" pitchFamily="34" charset="-122"/>
                 <a:cs typeface="Arial" pitchFamily="34" charset="-120"/>
               </a:rPr>
-              <a:t>Comparar las opciones de respuesta de un riesgo alto por su valor neto y justificar la elección por escrito</a:t>
+              <a:t>Comparar las respuestas a un riesgo alto por valor neto y, si no alcanza, con una matriz y su sensibilidad</a:t>
             </a:r>
             <a:endParaRPr lang="en-US" sz="1600" dirty="0"/>
           </a:p>
@@ -2858,7 +2858,7 @@
                 <a:ea typeface="Arial" pitchFamily="34" charset="-122"/>
                 <a:cs typeface="Arial" pitchFamily="34" charset="-120"/>
               </a:rPr>
-              <a:t>Calcula el valor neto de cada opción de respuesta y marca la recomendada</a:t>
+              <a:t>Calcula el valor neto, arma el expediente y la matriz, y marca la recomendada</a:t>
             </a:r>
             <a:endParaRPr lang="en-US" sz="1600" dirty="0"/>
           </a:p>
@@ -3664,7 +3664,7 @@
                 <a:ea typeface="Arial" pitchFamily="34" charset="-122"/>
                 <a:cs typeface="Arial" pitchFamily="34" charset="-120"/>
               </a:rPr>
-              <a:t>Opciones de respuesta por valor neto y plan de contingencia</a:t>
+              <a:t>Opciones por valor neto, matriz y plan de contingencia</a:t>
             </a:r>
             <a:endParaRPr lang="en-US" sz="1600" dirty="0"/>
           </a:p>
@@ -3937,7 +3937,7 @@
                 <a:ea typeface="Arial" pitchFamily="34" charset="-122"/>
                 <a:cs typeface="Arial" pitchFamily="34" charset="-120"/>
               </a:rPr>
-              <a:t>Contingencia activada y límite de etapa</a:t>
+              <a:t>Contingencia activada, decisiones vigentes y límite de etapa</a:t>
             </a:r>
             <a:endParaRPr lang="en-US" sz="1600" dirty="0"/>
           </a:p>
